--- a/dist/초2/사회·역사/변화와다양성/초2_사회·역사_변화와다양성_02_서로다른생활.pptx
+++ b/dist/초2/사회·역사/변화와다양성/초2_사회·역사_변화와다양성_02_서로다른생활.pptx
@@ -121,13 +121,13 @@
   <p:extLst>
     <p:ext uri="{521415D9-36F7-43E2-AB2F-B90AF26B5E84}">
       <p14:sectionLst xmlns:p14="http://schemas.microsoft.com/office/powerpoint/2010/main">
-        <p14:section name="도입" id="{fd06254e-ec7d-9063-f7a2-aae3f466c583}">
+        <p14:section name="도입" id="{05d42649-9313-8c7f-38cb-3b298774fa04}">
           <p14:sldIdLst>
             <p14:sldId id="256"/>
             <p14:sldId id="257"/>
           </p14:sldIdLst>
         </p14:section>
-        <p14:section name="개념" id="{7dcef4bd-2901-d502-d62d-323f6fb3eb25}">
+        <p14:section name="개념" id="{50aa36a8-99ce-10d0-9acc-692ec182636c}">
           <p14:sldIdLst>
             <p14:sldId id="258"/>
             <p14:sldId id="259"/>
@@ -135,7 +135,7 @@
             <p14:sldId id="263"/>
           </p14:sldIdLst>
         </p14:section>
-        <p14:section name="연습" id="{f709faca-e043-37a2-38a3-7265de445386}">
+        <p14:section name="연습" id="{fd2bd0a3-9849-f6d8-26e3-c1fb84f1a03b}">
           <p14:sldIdLst>
             <p14:sldId id="261"/>
             <p14:sldId id="262"/>
@@ -143,25 +143,25 @@
             <p14:sldId id="265"/>
           </p14:sldIdLst>
         </p14:section>
-        <p14:section name="개념" id="{8f9f3ee6-0ef3-8b19-7392-824e8340d18c}">
+        <p14:section name="개념" id="{d7dbba69-3ade-e98c-eaf7-31e15a94959a}">
           <p14:sldIdLst/>
         </p14:section>
-        <p14:section name="연습" id="{0e943505-47fb-a5db-9b33-afa3006453d8}">
+        <p14:section name="연습" id="{8245bed2-31f2-a1f1-2fc0-74fd4c342b7f}">
           <p14:sldIdLst/>
         </p14:section>
-        <p14:section name="확인" id="{708a653d-12fe-b7cc-f31e-ae9982aea617}">
+        <p14:section name="확인" id="{e1b62401-f648-84f2-ca90-d8a2e34f419e}">
           <p14:sldIdLst>
             <p14:sldId id="266"/>
             <p14:sldId id="267"/>
             <p14:sldId id="268"/>
           </p14:sldIdLst>
         </p14:section>
-        <p14:section name="정리" id="{f4a28d66-4300-b2cf-bbe9-b69a49ff5244}">
+        <p14:section name="정리" id="{307bdca0-b754-e680-f92c-2f5f61580d57}">
           <p14:sldIdLst>
             <p14:sldId id="269"/>
           </p14:sldIdLst>
         </p14:section>
-        <p14:section name="보충" id="{0598e0aa-7b7f-ee73-ae52-3b6bcb26c9e4}">
+        <p14:section name="보충" id="{c5dcd2f5-c8c7-707d-7de5-f81014e9a81d}">
           <p14:sldIdLst>
             <p14:sldId id="270"/>
           </p14:sldIdLst>
